--- a/plots/Figure4_three_cases.pptx
+++ b/plots/Figure4_three_cases.pptx
@@ -963,6 +963,10 @@
             <a:prstDash val="solid"/>
           </a:ln>
         </p:spPr>
+        <p:txBody>
+          <a:bodyPr/>
+          <a:p/>
+        </p:txBody>
       </p:sp>
       <p:sp>
         <p:nvSpPr>
@@ -983,6 +987,10 @@
           </a:solidFill>
           <a:ln/>
         </p:spPr>
+        <p:txBody>
+          <a:bodyPr/>
+          <a:p/>
+        </p:txBody>
       </p:sp>
       <p:sp>
         <p:nvSpPr>
@@ -1136,6 +1144,10 @@
             <a:prstDash val="solid"/>
           </a:ln>
         </p:spPr>
+        <p:txBody>
+          <a:bodyPr/>
+          <a:p/>
+        </p:txBody>
       </p:sp>
       <p:sp>
         <p:nvSpPr>
@@ -1272,6 +1284,10 @@
             <a:prstDash val="solid"/>
           </a:ln>
         </p:spPr>
+        <p:txBody>
+          <a:bodyPr/>
+          <a:p/>
+        </p:txBody>
       </p:sp>
       <p:sp>
         <p:nvSpPr>
@@ -1401,6 +1417,10 @@
           </a:solidFill>
           <a:ln/>
         </p:spPr>
+        <p:txBody>
+          <a:bodyPr/>
+          <a:p/>
+        </p:txBody>
       </p:sp>
       <p:sp>
         <p:nvSpPr>
@@ -1465,6 +1485,10 @@
             <a:prstDash val="solid"/>
           </a:ln>
         </p:spPr>
+        <p:txBody>
+          <a:bodyPr/>
+          <a:p/>
+        </p:txBody>
       </p:sp>
       <p:sp>
         <p:nvSpPr>
@@ -1621,7 +1645,7 @@
                 <a:ea typeface="Calibri"/>
                 <a:cs typeface="Calibri"/>
               </a:rPr>
-              <a:t> 7.8%</a:t>
+              <a:t> 7.0%</a:t>
             </a:r>
             <a:endParaRPr lang="en-US" sz="750" dirty="0">
               <a:solidFill>
@@ -1658,6 +1682,10 @@
             <a:prstDash val="solid"/>
           </a:ln>
         </p:spPr>
+        <p:txBody>
+          <a:bodyPr/>
+          <a:p/>
+        </p:txBody>
       </p:sp>
       <p:sp>
         <p:nvSpPr>
@@ -1827,7 +1855,7 @@
                 <a:ea typeface="Calibri"/>
                 <a:cs typeface="Calibri"/>
               </a:rPr>
-              <a:t>Gate 1 is never engaged: the 7.8% ASR is attack mismatch, not alignment strength.</a:t>
+              <a:t>Gate 1 is never engaged: the 7.0% ASR is attack mismatch, not alignment strength.</a:t>
             </a:r>
             <a:endParaRPr lang="en-US" sz="900">
               <a:latin typeface="Calibri"/>
@@ -1863,6 +1891,10 @@
             <a:prstDash val="solid"/>
           </a:ln>
         </p:spPr>
+        <p:txBody>
+          <a:bodyPr/>
+          <a:p/>
+        </p:txBody>
       </p:sp>
       <p:sp>
         <p:nvSpPr>
@@ -1883,6 +1915,10 @@
           </a:solidFill>
           <a:ln/>
         </p:spPr>
+        <p:txBody>
+          <a:bodyPr/>
+          <a:p/>
+        </p:txBody>
       </p:sp>
       <p:sp>
         <p:nvSpPr>
@@ -2036,6 +2072,10 @@
             <a:prstDash val="solid"/>
           </a:ln>
         </p:spPr>
+        <p:txBody>
+          <a:bodyPr/>
+          <a:p/>
+        </p:txBody>
       </p:sp>
       <p:sp>
         <p:nvSpPr>
@@ -2194,6 +2234,10 @@
             <a:prstDash val="solid"/>
           </a:ln>
         </p:spPr>
+        <p:txBody>
+          <a:bodyPr/>
+          <a:p/>
+        </p:txBody>
       </p:sp>
       <p:sp>
         <p:nvSpPr>
@@ -2347,6 +2391,10 @@
           </a:solidFill>
           <a:ln/>
         </p:spPr>
+        <p:txBody>
+          <a:bodyPr/>
+          <a:p/>
+        </p:txBody>
       </p:sp>
       <p:sp>
         <p:nvSpPr>
@@ -2411,6 +2459,10 @@
             <a:prstDash val="solid"/>
           </a:ln>
         </p:spPr>
+        <p:txBody>
+          <a:bodyPr/>
+          <a:p/>
+        </p:txBody>
       </p:sp>
       <p:sp>
         <p:nvSpPr>
@@ -2567,7 +2619,7 @@
                 <a:ea typeface="Calibri"/>
                 <a:cs typeface="Calibri"/>
               </a:rPr>
-              <a:t> 31.5%</a:t>
+              <a:t> 10.3%</a:t>
             </a:r>
             <a:r>
               <a:rPr lang="en-US" sz="750" dirty="0">
@@ -2607,6 +2659,10 @@
             <a:prstDash val="solid"/>
           </a:ln>
         </p:spPr>
+        <p:txBody>
+          <a:bodyPr/>
+          <a:p/>
+        </p:txBody>
       </p:sp>
       <p:sp>
         <p:nvSpPr>
@@ -2859,7 +2915,7 @@
                 <a:ea typeface="Calibri"/>
                 <a:cs typeface="Calibri"/>
               </a:rPr>
-              <a:t> still complies (ACTR 0.739): transferred failure ≠ safety.</a:t>
+              <a:t> still complies (ACTR 1.414): transferred failure ≠ safety.</a:t>
             </a:r>
             <a:endParaRPr lang="en-US" sz="900">
               <a:latin typeface="Calibri"/>
@@ -2895,6 +2951,10 @@
             <a:prstDash val="solid"/>
           </a:ln>
         </p:spPr>
+        <p:txBody>
+          <a:bodyPr/>
+          <a:p/>
+        </p:txBody>
       </p:sp>
       <p:sp>
         <p:nvSpPr>
@@ -2915,6 +2975,10 @@
           </a:solidFill>
           <a:ln/>
         </p:spPr>
+        <p:txBody>
+          <a:bodyPr/>
+          <a:p/>
+        </p:txBody>
       </p:sp>
       <p:sp>
         <p:nvSpPr>
@@ -3068,6 +3132,10 @@
             <a:prstDash val="solid"/>
           </a:ln>
         </p:spPr>
+        <p:txBody>
+          <a:bodyPr/>
+          <a:p/>
+        </p:txBody>
       </p:sp>
       <p:sp>
         <p:nvSpPr>
@@ -3248,6 +3316,10 @@
             <a:prstDash val="solid"/>
           </a:ln>
         </p:spPr>
+        <p:txBody>
+          <a:bodyPr/>
+          <a:p/>
+        </p:txBody>
       </p:sp>
       <p:sp>
         <p:nvSpPr>
@@ -3388,6 +3460,10 @@
           </a:solidFill>
           <a:ln/>
         </p:spPr>
+        <p:txBody>
+          <a:bodyPr/>
+          <a:p/>
+        </p:txBody>
       </p:sp>
       <p:sp>
         <p:nvSpPr>
@@ -3452,6 +3528,10 @@
             <a:prstDash val="solid"/>
           </a:ln>
         </p:spPr>
+        <p:txBody>
+          <a:bodyPr/>
+          <a:p/>
+        </p:txBody>
       </p:sp>
       <p:sp>
         <p:nvSpPr>
@@ -3681,7 +3761,7 @@
                 <a:ea typeface="Calibri"/>
                 <a:cs typeface="Calibri"/>
               </a:rPr>
-              <a:t> 46.9%</a:t>
+              <a:t> 47.3%</a:t>
             </a:r>
             <a:endParaRPr lang="en-US" sz="750" dirty="0">
               <a:solidFill>
@@ -3718,6 +3798,10 @@
             <a:prstDash val="solid"/>
           </a:ln>
         </p:spPr>
+        <p:txBody>
+          <a:bodyPr/>
+          <a:p/>
+        </p:txBody>
       </p:sp>
       <p:sp>
         <p:nvSpPr>
@@ -4067,6 +4151,10 @@
           </a:solidFill>
           <a:ln/>
         </p:spPr>
+        <p:txBody>
+          <a:bodyPr/>
+          <a:p/>
+        </p:txBody>
       </p:sp>
       <p:sp>
         <p:nvSpPr>
@@ -4172,6 +4260,10 @@
             <a:prstDash val="solid"/>
           </a:ln>
         </p:spPr>
+        <p:txBody>
+          <a:bodyPr/>
+          <a:p/>
+        </p:txBody>
       </p:sp>
       <p:sp>
         <p:nvSpPr>
@@ -4311,6 +4403,10 @@
             <a:prstDash val="solid"/>
           </a:ln>
         </p:spPr>
+        <p:txBody>
+          <a:bodyPr/>
+          <a:p/>
+        </p:txBody>
       </p:sp>
       <p:sp>
         <p:nvSpPr>
@@ -4450,6 +4546,10 @@
             <a:prstDash val="solid"/>
           </a:ln>
         </p:spPr>
+        <p:txBody>
+          <a:bodyPr/>
+          <a:p/>
+        </p:txBody>
       </p:sp>
       <p:sp>
         <p:nvSpPr>
@@ -4589,6 +4689,10 @@
             <a:prstDash val="solid"/>
           </a:ln>
         </p:spPr>
+        <p:txBody>
+          <a:bodyPr/>
+          <a:p/>
+        </p:txBody>
       </p:sp>
       <p:sp>
         <p:nvSpPr>
@@ -4727,6 +4831,10 @@
           </a:solidFill>
           <a:ln/>
         </p:spPr>
+        <p:txBody>
+          <a:bodyPr/>
+          <a:p/>
+        </p:txBody>
       </p:sp>
       <p:sp>
         <p:nvSpPr>
